--- a/dist/weeks-포트폴리오제작/포트폴리오제작_13주차_이력서연계와피칭.pptx
+++ b/dist/weeks-포트폴리오제작/포트폴리오제작_13주차_이력서연계와피칭.pptx
@@ -2244,7 +2244,7 @@
                 <a:ea typeface="Pretendard" pitchFamily="34" charset="-122"/>
                 <a:cs typeface="Pretendard" pitchFamily="34" charset="-120"/>
               </a:rPr>
-              <a:t>90분 — 강의 20분 · 스크립트 작성 40분 · 1:1 피드백 20분</a:t>
+              <a:t>120분 — 강의 20분 · 스크립트 작성 45분 · 1:1 피드백 35분 · 안내 10분</a:t>
             </a:r>
             <a:endParaRPr lang="en-US" sz="1200" dirty="0"/>
           </a:p>
@@ -3830,7 +3830,7 @@
                 <a:ea typeface="Pretendard Black" pitchFamily="34" charset="-122"/>
                 <a:cs typeface="Pretendard Black" pitchFamily="34" charset="-120"/>
               </a:rPr>
-              <a:t>오늘의 90분</a:t>
+              <a:t>오늘의 120분</a:t>
             </a:r>
             <a:endParaRPr lang="en-US" sz="3000" dirty="0"/>
           </a:p>
@@ -3869,7 +3869,7 @@
                 <a:ea typeface="Pretendard" pitchFamily="34" charset="-122"/>
                 <a:cs typeface="Pretendard" pitchFamily="34" charset="-120"/>
               </a:rPr>
-              <a:t>강의 20분 · 스크립트 작성 40분 · 1:1 피드백 20분</a:t>
+              <a:t>강의 20분 · 스크립트 작성 45분 · 1:1 피드백 35분 · 안내 10분</a:t>
             </a:r>
             <a:endParaRPr lang="en-US" sz="1150" dirty="0"/>
           </a:p>
@@ -3909,7 +3909,7 @@
         <p:spPr>
           <a:xfrm>
             <a:off x="640080" y="1719072"/>
-            <a:ext cx="1600200" cy="932688"/>
+            <a:ext cx="1600200" cy="830275"/>
           </a:xfrm>
           <a:prstGeom prst="rect">
             <a:avLst/>
@@ -3948,7 +3948,7 @@
         <p:spPr>
           <a:xfrm>
             <a:off x="2377440" y="1719072"/>
-            <a:ext cx="6888175" cy="932688"/>
+            <a:ext cx="6888175" cy="830275"/>
           </a:xfrm>
           <a:prstGeom prst="rect">
             <a:avLst/>
@@ -3987,7 +3987,7 @@
         <p:spPr>
           <a:xfrm>
             <a:off x="9265615" y="1719072"/>
-            <a:ext cx="2286000" cy="932688"/>
+            <a:ext cx="2286000" cy="830275"/>
           </a:xfrm>
           <a:prstGeom prst="rect">
             <a:avLst/>
@@ -4025,7 +4025,7 @@
         </p:nvSpPr>
         <p:spPr>
           <a:xfrm>
-            <a:off x="640080" y="2633472"/>
+            <a:off x="640080" y="2531059"/>
             <a:ext cx="10911535" cy="7315"/>
           </a:xfrm>
           <a:prstGeom prst="rect">
@@ -4050,8 +4050,8 @@
         </p:nvSpPr>
         <p:spPr>
           <a:xfrm>
-            <a:off x="640080" y="2651760"/>
-            <a:ext cx="1600200" cy="932688"/>
+            <a:off x="640080" y="2549347"/>
+            <a:ext cx="1600200" cy="830275"/>
           </a:xfrm>
           <a:prstGeom prst="rect">
             <a:avLst/>
@@ -4075,7 +4075,7 @@
                 <a:ea typeface="Pretendard" pitchFamily="34" charset="-122"/>
                 <a:cs typeface="Pretendard" pitchFamily="34" charset="-120"/>
               </a:rPr>
-              <a:t>00:20–01:00</a:t>
+              <a:t>00:20–01:05</a:t>
             </a:r>
             <a:endParaRPr lang="en-US" sz="1050" dirty="0"/>
           </a:p>
@@ -4089,8 +4089,8 @@
         </p:nvSpPr>
         <p:spPr>
           <a:xfrm>
-            <a:off x="2377440" y="2651760"/>
-            <a:ext cx="6888175" cy="932688"/>
+            <a:off x="2377440" y="2549347"/>
+            <a:ext cx="6888175" cy="830275"/>
           </a:xfrm>
           <a:prstGeom prst="rect">
             <a:avLst/>
@@ -4128,8 +4128,8 @@
         </p:nvSpPr>
         <p:spPr>
           <a:xfrm>
-            <a:off x="9265615" y="2651760"/>
-            <a:ext cx="2286000" cy="932688"/>
+            <a:off x="9265615" y="2549347"/>
+            <a:ext cx="2286000" cy="830275"/>
           </a:xfrm>
           <a:prstGeom prst="rect">
             <a:avLst/>
@@ -4167,7 +4167,7 @@
         </p:nvSpPr>
         <p:spPr>
           <a:xfrm>
-            <a:off x="640080" y="3566160"/>
+            <a:off x="640080" y="3361334"/>
             <a:ext cx="10911535" cy="7315"/>
           </a:xfrm>
           <a:prstGeom prst="rect">
@@ -4192,8 +4192,111 @@
         </p:nvSpPr>
         <p:spPr>
           <a:xfrm>
-            <a:off x="640080" y="3584448"/>
-            <a:ext cx="1600200" cy="932688"/>
+            <a:off x="640080" y="3379622"/>
+            <a:ext cx="1600200" cy="830275"/>
+          </a:xfrm>
+          <a:prstGeom prst="rect">
+            <a:avLst/>
+          </a:prstGeom>
+          <a:noFill/>
+          <a:ln/>
+        </p:spPr>
+        <p:txBody>
+          <a:bodyPr wrap="square" lIns="0" tIns="0" rIns="0" bIns="0" rtlCol="0" anchor="ctr"/>
+          <a:lstStyle/>
+          <a:p>
+            <a:pPr indent="0" marL="0">
+              <a:buNone/>
+            </a:pPr>
+            <a:r>
+              <a:rPr lang="en-US" sz="1050" spc="60" kern="0" dirty="0">
+                <a:solidFill>
+                  <a:srgbClr val="9B9B9B"/>
+                </a:solidFill>
+                <a:latin typeface="Pretendard" pitchFamily="34" charset="0"/>
+                <a:ea typeface="Pretendard" pitchFamily="34" charset="-122"/>
+                <a:cs typeface="Pretendard" pitchFamily="34" charset="-120"/>
+              </a:rPr>
+              <a:t>01:05–01:15</a:t>
+            </a:r>
+            <a:endParaRPr lang="en-US" sz="1050" dirty="0"/>
+          </a:p>
+        </p:txBody>
+      </p:sp>
+      <p:sp>
+        <p:nvSpPr>
+          <p:cNvPr id="19" name="Text 17"/>
+          <p:cNvSpPr/>
+          <p:nvPr/>
+        </p:nvSpPr>
+        <p:spPr>
+          <a:xfrm>
+            <a:off x="2377440" y="3379622"/>
+            <a:ext cx="6888175" cy="830275"/>
+          </a:xfrm>
+          <a:prstGeom prst="rect">
+            <a:avLst/>
+          </a:prstGeom>
+          <a:noFill/>
+          <a:ln/>
+        </p:spPr>
+        <p:txBody>
+          <a:bodyPr wrap="square" lIns="0" tIns="0" rIns="0" bIns="0" rtlCol="0" anchor="ctr"/>
+          <a:lstStyle/>
+          <a:p>
+            <a:pPr indent="0" marL="0">
+              <a:buNone/>
+            </a:pPr>
+            <a:r>
+              <a:rPr lang="en-US" sz="1100" dirty="0">
+                <a:solidFill>
+                  <a:srgbClr val="9B9B9B"/>
+                </a:solidFill>
+                <a:latin typeface="Pretendard" pitchFamily="34" charset="0"/>
+                <a:ea typeface="Pretendard" pitchFamily="34" charset="-122"/>
+                <a:cs typeface="Pretendard" pitchFamily="34" charset="-120"/>
+              </a:rPr>
+              <a:t>휴식</a:t>
+            </a:r>
+            <a:endParaRPr lang="en-US" sz="1100" dirty="0"/>
+          </a:p>
+        </p:txBody>
+      </p:sp>
+      <p:sp>
+        <p:nvSpPr>
+          <p:cNvPr id="20" name="Shape 18"/>
+          <p:cNvSpPr/>
+          <p:nvPr/>
+        </p:nvSpPr>
+        <p:spPr>
+          <a:xfrm>
+            <a:off x="640080" y="4191610"/>
+            <a:ext cx="10911535" cy="7315"/>
+          </a:xfrm>
+          <a:prstGeom prst="rect">
+            <a:avLst/>
+          </a:prstGeom>
+          <a:solidFill>
+            <a:srgbClr val="EFEFEF"/>
+          </a:solidFill>
+          <a:ln w="12700">
+            <a:solidFill>
+              <a:srgbClr val="EFEFEF"/>
+            </a:solidFill>
+            <a:prstDash val="solid"/>
+          </a:ln>
+        </p:spPr>
+      </p:sp>
+      <p:sp>
+        <p:nvSpPr>
+          <p:cNvPr id="21" name="Text 19"/>
+          <p:cNvSpPr/>
+          <p:nvPr/>
+        </p:nvSpPr>
+        <p:spPr>
+          <a:xfrm>
+            <a:off x="640080" y="4209898"/>
+            <a:ext cx="1600200" cy="830275"/>
           </a:xfrm>
           <a:prstGeom prst="rect">
             <a:avLst/>
@@ -4217,7 +4320,7 @@
                 <a:ea typeface="Pretendard" pitchFamily="34" charset="-122"/>
                 <a:cs typeface="Pretendard" pitchFamily="34" charset="-120"/>
               </a:rPr>
-              <a:t>01:00–01:20</a:t>
+              <a:t>01:15–01:50</a:t>
             </a:r>
             <a:endParaRPr lang="en-US" sz="1050" dirty="0"/>
           </a:p>
@@ -4225,14 +4328,14 @@
       </p:sp>
       <p:sp>
         <p:nvSpPr>
-          <p:cNvPr id="19" name="Text 17"/>
-          <p:cNvSpPr/>
-          <p:nvPr/>
-        </p:nvSpPr>
-        <p:spPr>
-          <a:xfrm>
-            <a:off x="2377440" y="3584448"/>
-            <a:ext cx="6888175" cy="932688"/>
+          <p:cNvPr id="22" name="Text 20"/>
+          <p:cNvSpPr/>
+          <p:nvPr/>
+        </p:nvSpPr>
+        <p:spPr>
+          <a:xfrm>
+            <a:off x="2377440" y="4209898"/>
+            <a:ext cx="6888175" cy="830275"/>
           </a:xfrm>
           <a:prstGeom prst="rect">
             <a:avLst/>
@@ -4264,14 +4367,14 @@
       </p:sp>
       <p:sp>
         <p:nvSpPr>
-          <p:cNvPr id="20" name="Text 18"/>
-          <p:cNvSpPr/>
-          <p:nvPr/>
-        </p:nvSpPr>
-        <p:spPr>
-          <a:xfrm>
-            <a:off x="9265615" y="3584448"/>
-            <a:ext cx="2286000" cy="932688"/>
+          <p:cNvPr id="23" name="Text 21"/>
+          <p:cNvSpPr/>
+          <p:nvPr/>
+        </p:nvSpPr>
+        <p:spPr>
+          <a:xfrm>
+            <a:off x="9265615" y="4209898"/>
+            <a:ext cx="2286000" cy="830275"/>
           </a:xfrm>
           <a:prstGeom prst="rect">
             <a:avLst/>
@@ -4303,13 +4406,13 @@
       </p:sp>
       <p:sp>
         <p:nvSpPr>
-          <p:cNvPr id="21" name="Shape 19"/>
-          <p:cNvSpPr/>
-          <p:nvPr/>
-        </p:nvSpPr>
-        <p:spPr>
-          <a:xfrm>
-            <a:off x="640080" y="4498848"/>
+          <p:cNvPr id="24" name="Shape 22"/>
+          <p:cNvSpPr/>
+          <p:nvPr/>
+        </p:nvSpPr>
+        <p:spPr>
+          <a:xfrm>
+            <a:off x="640080" y="5021885"/>
             <a:ext cx="10911535" cy="7315"/>
           </a:xfrm>
           <a:prstGeom prst="rect">
@@ -4328,14 +4431,14 @@
       </p:sp>
       <p:sp>
         <p:nvSpPr>
-          <p:cNvPr id="22" name="Text 20"/>
-          <p:cNvSpPr/>
-          <p:nvPr/>
-        </p:nvSpPr>
-        <p:spPr>
-          <a:xfrm>
-            <a:off x="640080" y="4517136"/>
-            <a:ext cx="1600200" cy="932688"/>
+          <p:cNvPr id="25" name="Text 23"/>
+          <p:cNvSpPr/>
+          <p:nvPr/>
+        </p:nvSpPr>
+        <p:spPr>
+          <a:xfrm>
+            <a:off x="640080" y="5040173"/>
+            <a:ext cx="1600200" cy="830275"/>
           </a:xfrm>
           <a:prstGeom prst="rect">
             <a:avLst/>
@@ -4359,7 +4462,7 @@
                 <a:ea typeface="Pretendard" pitchFamily="34" charset="-122"/>
                 <a:cs typeface="Pretendard" pitchFamily="34" charset="-120"/>
               </a:rPr>
-              <a:t>01:20–01:30</a:t>
+              <a:t>01:50–02:00</a:t>
             </a:r>
             <a:endParaRPr lang="en-US" sz="1050" dirty="0"/>
           </a:p>
@@ -4367,14 +4470,14 @@
       </p:sp>
       <p:sp>
         <p:nvSpPr>
-          <p:cNvPr id="23" name="Text 21"/>
-          <p:cNvSpPr/>
-          <p:nvPr/>
-        </p:nvSpPr>
-        <p:spPr>
-          <a:xfrm>
-            <a:off x="2377440" y="4517136"/>
-            <a:ext cx="6888175" cy="932688"/>
+          <p:cNvPr id="26" name="Text 24"/>
+          <p:cNvSpPr/>
+          <p:nvPr/>
+        </p:nvSpPr>
+        <p:spPr>
+          <a:xfrm>
+            <a:off x="2377440" y="5040173"/>
+            <a:ext cx="6888175" cy="830275"/>
           </a:xfrm>
           <a:prstGeom prst="rect">
             <a:avLst/>
@@ -4406,14 +4509,14 @@
       </p:sp>
       <p:sp>
         <p:nvSpPr>
-          <p:cNvPr id="24" name="Text 22"/>
-          <p:cNvSpPr/>
-          <p:nvPr/>
-        </p:nvSpPr>
-        <p:spPr>
-          <a:xfrm>
-            <a:off x="9265615" y="4517136"/>
-            <a:ext cx="2286000" cy="932688"/>
+          <p:cNvPr id="27" name="Text 25"/>
+          <p:cNvSpPr/>
+          <p:nvPr/>
+        </p:nvSpPr>
+        <p:spPr>
+          <a:xfrm>
+            <a:off x="9265615" y="5040173"/>
+            <a:ext cx="2286000" cy="830275"/>
           </a:xfrm>
           <a:prstGeom prst="rect">
             <a:avLst/>
@@ -4445,13 +4548,13 @@
       </p:sp>
       <p:sp>
         <p:nvSpPr>
-          <p:cNvPr id="25" name="Shape 23"/>
-          <p:cNvSpPr/>
-          <p:nvPr/>
-        </p:nvSpPr>
-        <p:spPr>
-          <a:xfrm>
-            <a:off x="640080" y="5431536"/>
+          <p:cNvPr id="28" name="Shape 26"/>
+          <p:cNvSpPr/>
+          <p:nvPr/>
+        </p:nvSpPr>
+        <p:spPr>
+          <a:xfrm>
+            <a:off x="640080" y="5852160"/>
             <a:ext cx="10911535" cy="7315"/>
           </a:xfrm>
           <a:prstGeom prst="rect">
@@ -4470,7 +4573,7 @@
       </p:sp>
       <p:sp>
         <p:nvSpPr>
-          <p:cNvPr id="26" name="Shape 24"/>
+          <p:cNvPr id="29" name="Shape 27"/>
           <p:cNvSpPr/>
           <p:nvPr/>
         </p:nvSpPr>
@@ -4495,7 +4598,7 @@
       </p:sp>
       <p:sp>
         <p:nvSpPr>
-          <p:cNvPr id="27" name="Text 25"/>
+          <p:cNvPr id="30" name="Text 28"/>
           <p:cNvSpPr/>
           <p:nvPr/>
         </p:nvSpPr>
@@ -4534,7 +4637,7 @@
       </p:sp>
       <p:sp>
         <p:nvSpPr>
-          <p:cNvPr id="28" name="Text 26"/>
+          <p:cNvPr id="31" name="Text 29"/>
           <p:cNvSpPr/>
           <p:nvPr/>
         </p:nvSpPr>
@@ -10435,7 +10538,7 @@
                 <a:ea typeface="Pretendard" pitchFamily="34" charset="-122"/>
                 <a:cs typeface="Pretendard" pitchFamily="34" charset="-120"/>
               </a:rPr>
-              <a:t>40분 · 개인 — 다 쓴 사람부터 피드백을 받습니다.</a:t>
+              <a:t>45분 · 개인 — 다 쓴 사람부터 피드백을 받습니다.</a:t>
             </a:r>
             <a:endParaRPr lang="en-US" sz="1150" dirty="0"/>
           </a:p>
@@ -10499,7 +10602,7 @@
                 <a:ea typeface="Pretendard Light" pitchFamily="34" charset="-122"/>
                 <a:cs typeface="Pretendard Light" pitchFamily="34" charset="-120"/>
               </a:rPr>
-              <a:t>5분</a:t>
+              <a:t>6분</a:t>
             </a:r>
             <a:endParaRPr lang="en-US" sz="2200" dirty="0"/>
           </a:p>
@@ -10644,7 +10747,7 @@
                 <a:ea typeface="Pretendard Light" pitchFamily="34" charset="-122"/>
                 <a:cs typeface="Pretendard Light" pitchFamily="34" charset="-120"/>
               </a:rPr>
-              <a:t>20분</a:t>
+              <a:t>22분</a:t>
             </a:r>
             <a:endParaRPr lang="en-US" sz="2200" dirty="0"/>
           </a:p>
@@ -10789,7 +10892,7 @@
                 <a:ea typeface="Pretendard Light" pitchFamily="34" charset="-122"/>
                 <a:cs typeface="Pretendard Light" pitchFamily="34" charset="-120"/>
               </a:rPr>
-              <a:t>10분</a:t>
+              <a:t>11분</a:t>
             </a:r>
             <a:endParaRPr lang="en-US" sz="2200" dirty="0"/>
           </a:p>
@@ -10934,7 +11037,7 @@
                 <a:ea typeface="Pretendard Light" pitchFamily="34" charset="-122"/>
                 <a:cs typeface="Pretendard Light" pitchFamily="34" charset="-120"/>
               </a:rPr>
-              <a:t>5분</a:t>
+              <a:t>6분</a:t>
             </a:r>
             <a:endParaRPr lang="en-US" sz="2200" dirty="0"/>
           </a:p>

--- a/dist/weeks-포트폴리오제작/포트폴리오제작_13주차_이력서연계와피칭.pptx
+++ b/dist/weeks-포트폴리오제작/포트폴리오제작_13주차_이력서연계와피칭.pptx
@@ -511,7 +511,8 @@
           <a:p>
             <a:r>
               <a:rPr lang="en-US" dirty="0"/>
-              <a:t>이력서를 안 써 온 학생이 있으면 오늘 연계 작업을 할 수 없다. 12주차 과제에서 미리 받아둘 것.</a:t>
+              <a:t>[운영 메모]
+이력서를 안 써 온 학생이 있으면 오늘 연계 작업을 할 수 없다. 12주차 과제에서 미리 받아둘 것.</a:t>
             </a:r>
             <a:endParaRPr lang="en-US" dirty="0"/>
           </a:p>
@@ -599,7 +600,8 @@
           <a:p>
             <a:r>
               <a:rPr lang="en-US" dirty="0"/>
-              <a:t>'소리 내어 읽고 시간 재기'를 반드시 시킬 것. 안 하면 14주차 리허설에서 전부 시간을 넘긴다.</a:t>
+              <a:t>[운영 메모]
+'소리 내어 읽고 시간 재기'를 반드시 시킬 것. 안 하면 14주차 리허설에서 전부 시간을 넘긴다.</a:t>
             </a:r>
             <a:endParaRPr lang="en-US" dirty="0"/>
           </a:p>
@@ -687,7 +689,8 @@
           <a:p>
             <a:r>
               <a:rPr lang="en-US" dirty="0"/>
-              <a:t>1:1 피드백 20분에 전원은 불가능하다. 스크립트를 다 쓴 학생부터 짧게 보거나, 조별 상호 피드백으로 대체하고 개별은 희망자만 받을 것.</a:t>
+              <a:t>[운영 메모]
+1:1 피드백 20분에 전원은 불가능하다. 스크립트를 다 쓴 학생부터 짧게 보거나, 조별 상호 피드백으로 대체하고 개별은 희망자만 받을 것.</a:t>
             </a:r>
             <a:endParaRPr lang="en-US" dirty="0"/>
           </a:p>
@@ -775,7 +778,8 @@
           <a:p>
             <a:r>
               <a:rPr lang="en-US" dirty="0"/>
-              <a:t>학생들이 발표를 '설명'으로 생각한다. '남기는 것'으로 프레임을 바꿔줄 것.</a:t>
+              <a:t>[운영 메모]
+학생들이 발표를 '설명'으로 생각한다. '남기는 것'으로 프레임을 바꿔줄 것.</a:t>
             </a:r>
             <a:endParaRPr lang="en-US" dirty="0"/>
           </a:p>
@@ -863,7 +867,8 @@
           <a:p>
             <a:r>
               <a:rPr lang="en-US" dirty="0"/>
-              <a:t>이력서 작성법 수업이 아니다. '연계'에만 집중할 것.</a:t>
+              <a:t>[운영 메모]
+이력서 작성법 수업이 아니다. '연계'에만 집중할 것.</a:t>
             </a:r>
             <a:endParaRPr lang="en-US" dirty="0"/>
           </a:p>
@@ -951,7 +956,8 @@
           <a:p>
             <a:r>
               <a:rPr lang="en-US" dirty="0"/>
-              <a:t>나란히 놓고 읽기를 실습 시작 전에 5분만 시켜도 문제가 여러 개 발견된다.</a:t>
+              <a:t>[운영 메모]
+나란히 놓고 읽기를 실습 시작 전에 5분만 시켜도 문제가 여러 개 발견된다.</a:t>
             </a:r>
             <a:endParaRPr lang="en-US" dirty="0"/>
           </a:p>
@@ -1039,7 +1045,8 @@
           <a:p>
             <a:r>
               <a:rPr lang="en-US" dirty="0"/>
-              <a:t>구조를 주고 바로 쓰게 할 것.</a:t>
+              <a:t>[운영 메모]
+구조를 주고 바로 쓰게 할 것.</a:t>
             </a:r>
             <a:endParaRPr lang="en-US" dirty="0"/>
           </a:p>
@@ -1127,7 +1134,8 @@
           <a:p>
             <a:r>
               <a:rPr lang="en-US" dirty="0"/>
-              <a:t>'하나만'을 강하게 말할 것. 매년 전부 말하려다 시간을 넘긴다.</a:t>
+              <a:t>[운영 메모]
+'하나만'을 강하게 말할 것. 매년 전부 말하려다 시간을 넘긴다.</a:t>
             </a:r>
             <a:endParaRPr lang="en-US" dirty="0"/>
           </a:p>
@@ -1215,7 +1223,8 @@
           <a:p>
             <a:r>
               <a:rPr lang="en-US" dirty="0"/>
-              <a:t>학생들이 발표 원고를 보고서체로 쓴다. 이 대비를 소리 내어 읽어 보이면 바로 이해한다.</a:t>
+              <a:t>[운영 메모]
+학생들이 발표 원고를 보고서체로 쓴다. 이 대비를 소리 내어 읽어 보이면 바로 이해한다.</a:t>
             </a:r>
             <a:endParaRPr lang="en-US" dirty="0"/>
           </a:p>
@@ -1303,7 +1312,8 @@
           <a:p>
             <a:r>
               <a:rPr lang="en-US" dirty="0"/>
-              <a:t>소리 내어 읽기를 부끄러워하면 복도나 빈 자리로 흩어지게 할 것. 안 읽으면 의미가 없다.</a:t>
+              <a:t>[운영 메모]
+소리 내어 읽기를 부끄러워하면 복도나 빈 자리로 흩어지게 할 것. 안 읽으면 의미가 없다.</a:t>
             </a:r>
             <a:endParaRPr lang="en-US" dirty="0"/>
           </a:p>
